--- a/docs/AUREN-IOSCO-TechSprint-Demo-Day.pptx
+++ b/docs/AUREN-IOSCO-TechSprint-Demo-Day.pptx
@@ -9419,7 +9419,7 @@
                 <a:ea typeface="Calibri" pitchFamily="34" charset="-122"/>
                 <a:cs typeface="Calibri" pitchFamily="34" charset="-120"/>
               </a:rPr>
-              <a:t>3 · SOLUTION DETAILS</a:t>
+              <a:t>3 · SOLUTION DETAIL</a:t>
             </a:r>
             <a:endParaRPr lang="en-US" sz="1100" dirty="0"/>
           </a:p>
@@ -10782,7 +10782,7 @@
                 <a:ea typeface="Calibri" pitchFamily="34" charset="-122"/>
                 <a:cs typeface="Calibri" pitchFamily="34" charset="-120"/>
               </a:rPr>
-              <a:t>4 · DEMO</a:t>
+              <a:t>4 · DEMONSTRATION</a:t>
             </a:r>
             <a:endParaRPr lang="en-US" sz="1100" dirty="0"/>
           </a:p>
